--- a/assets/pptx/catalog-776.pptx
+++ b/assets/pptx/catalog-776.pptx
@@ -3389,7 +3389,7 @@
                 <a:ea typeface="Ebrima"/>
                 <a:cs typeface="Ebrima"/>
               </a:rPr>
-              <a:t>ሲያግዘኝ በዓይኔ እያየሁ (2x)</a:t>
+              <a:t>ሲያግዘኝ በዓይኔ እያየሁ 2x</a:t>
             </a:r>
           </a:p>
         </p:txBody>
@@ -3474,7 +3474,7 @@
                 <a:ea typeface="Ebrima"/>
                 <a:cs typeface="Ebrima"/>
               </a:rPr>
-              <a:t>ማነው ለእኔስ ፈጥኖ የደረሰው (2x)</a:t>
+              <a:t>ማነው ለእኔስ ፈጥኖ የደረሰው 2x</a:t>
             </a:r>
           </a:p>
         </p:txBody>
@@ -3559,7 +3559,7 @@
                 <a:ea typeface="Ebrima"/>
                 <a:cs typeface="Ebrima"/>
               </a:rPr>
-              <a:t>ጌታ እኮ ነው አሃ (3x)</a:t>
+              <a:t>ጌታ እኮ ነው አሃ 3x</a:t>
             </a:r>
           </a:p>
           <a:p>
@@ -3716,7 +3716,7 @@
                 <a:ea typeface="Ebrima"/>
                 <a:cs typeface="Ebrima"/>
               </a:rPr>
-              <a:t>ዘለዓለም ልገዛ ልስገድልህ (2x)</a:t>
+              <a:t>ዘለዓለም ልገዛ ልስገድልህ 2x</a:t>
             </a:r>
           </a:p>
         </p:txBody>
@@ -3922,7 +3922,7 @@
                 <a:ea typeface="Ebrima"/>
                 <a:cs typeface="Ebrima"/>
               </a:rPr>
-              <a:t>ሲያግዘኝ በዓይኔ እያየሁ (2x)</a:t>
+              <a:t>ሲያግዘኝ በዓይኔ እያየሁ 2x</a:t>
             </a:r>
           </a:p>
         </p:txBody>
@@ -4043,7 +4043,7 @@
                 <a:ea typeface="Ebrima"/>
                 <a:cs typeface="Ebrima"/>
               </a:rPr>
-              <a:t>እወጣዋለሁ የአንተ ነው ኃይሉ (2x)</a:t>
+              <a:t>እወጣዋለሁ የአንተ ነው ኃይሉ 2x</a:t>
             </a:r>
           </a:p>
         </p:txBody>
@@ -4128,7 +4128,7 @@
                 <a:ea typeface="Ebrima"/>
                 <a:cs typeface="Ebrima"/>
               </a:rPr>
-              <a:t>ማነው ለእኔስ ፈጥኖ የደረሰው (2x)</a:t>
+              <a:t>ማነው ለእኔስ ፈጥኖ የደረሰው 2x</a:t>
             </a:r>
           </a:p>
         </p:txBody>
@@ -4213,7 +4213,7 @@
                 <a:ea typeface="Ebrima"/>
                 <a:cs typeface="Ebrima"/>
               </a:rPr>
-              <a:t>ጌታ እኮ ነው አሃ (3x)</a:t>
+              <a:t>ጌታ እኮ ነው አሃ 3x</a:t>
             </a:r>
           </a:p>
           <a:p>
